--- a/cursos/recursos/el-mapa-de-los-finales/09-dama-contra-peon.pptx
+++ b/cursos/recursos/el-mapa-de-los-finales/09-dama-contra-peon.pptx
@@ -6707,7 +6707,7 @@
                 </a:solidFill>
                 <a:latin typeface="Calibri"/>
               </a:rPr>
-              <a:t>Trazá la zona ganadora para el peón de alfil y de torre y verificá con el motor tres posiciones dentro y fuera de ella.</a:t>
+              <a:t>Traza la zona ganadora para el peón de alfil y de torre y verifica con el motor tres posiciones dentro y fuera de ella.</a:t>
             </a:r>
           </a:p>
           <a:p>
@@ -6778,7 +6778,7 @@
                 </a:solidFill>
                 <a:latin typeface="Calibri"/>
               </a:rPr>
-              <a:t>•  Recorré cada línea principal hasta entender el porqué de cada jugada.</a:t>
+              <a:t>•  Recorre cada línea principal hasta entender el porqué de cada jugada.</a:t>
             </a:r>
           </a:p>
           <a:p>
@@ -6794,7 +6794,7 @@
                 </a:solidFill>
                 <a:latin typeface="Calibri"/>
               </a:rPr>
-              <a:t>•  Practicá primero las posiciones clave, después las demás.</a:t>
+              <a:t>•  Practica primero las posiciones clave, después las demás.</a:t>
             </a:r>
           </a:p>
           <a:p>
@@ -6810,7 +6810,7 @@
                 </a:solidFill>
                 <a:latin typeface="Calibri"/>
               </a:rPr>
-              <a:t>•  Anotá las reglas de cada final con tus palabras.</a:t>
+              <a:t>•  Anota las reglas de cada final con tus palabras.</a:t>
             </a:r>
           </a:p>
         </p:txBody>

--- a/cursos/recursos/el-mapa-de-los-finales/09-dama-contra-peon.pptx
+++ b/cursos/recursos/el-mapa-de-los-finales/09-dama-contra-peon.pptx
@@ -6209,7 +6209,7 @@
                 </a:solidFill>
                 <a:latin typeface="Calibri"/>
               </a:rPr>
-              <a:t>Coronar los dos no siempre es tablas: la dama recién coronada en el rincón puede caer en una red de mate o perderse por horquilla. Con el rey fuerte en d3 o c4 (o sus simétricas) hay una maniobra ganadora estándar.</a:t>
+              <a:t>Coronar los dos no siempre es tablas: la dama recién coronada en el rincón puede caer en una red de mate o perderse por tenedor. Con el rey fuerte en d3 o c4 (o sus simétricas) hay una maniobra ganadora estándar.</a:t>
             </a:r>
           </a:p>
         </p:txBody>
